--- a/scooter_reliability_presentation.pptx
+++ b/scooter_reliability_presentation.pptx
@@ -1645,7 +1645,7 @@
                 <a:ea typeface="Calibri" pitchFamily="34" charset="-122"/>
                 <a:cs typeface="Calibri" pitchFamily="34" charset="-120"/>
               </a:rPr>
-              <a:t>Fleet Reliability Review   |   Data Science   |   QuorWatt Urban Mobility</a:t>
+              <a:t>Nikhil Bansal   |   Data Science   |   Fleet Reliability Review, QuorWatt Urban Mobility</a:t>
             </a:r>
             <a:endParaRPr lang="en-US" sz="1200" dirty="0"/>
           </a:p>
